--- a/presentations/PR_L12_Gatehouse_Lesson.pptx
+++ b/presentations/PR_L12_Gatehouse_Lesson.pptx
@@ -2617,7 +2617,7 @@
                 <a:ea typeface="IBM Plex Sans" pitchFamily="34" charset="-122"/>
                 <a:cs typeface="IBM Plex Sans" pitchFamily="34" charset="-120"/>
               </a:rPr>
-              <a:t>Mistake: validating at the end, when the first bad value has already been used.</a:t>
+              <a:t>Common mistake: validating at the end, when the first bad value has already been used.</a:t>
             </a:r>
             <a:endParaRPr lang="en-US" sz="1700" dirty="0"/>
           </a:p>
@@ -7707,7 +7707,7 @@
                 <a:ea typeface="IBM Plex Sans" pitchFamily="34" charset="-122"/>
                 <a:cs typeface="IBM Plex Sans" pitchFamily="34" charset="-120"/>
               </a:rPr>
-              <a:t>Mistake: casting with int() before checking, which stops the program instead of rejecting the value.</a:t>
+              <a:t>Common mistake: casting with int() before checking, which stops the program instead of rejecting the value.</a:t>
             </a:r>
             <a:endParaRPr lang="en-US" sz="1700" dirty="0"/>
           </a:p>
@@ -8283,7 +8283,7 @@
                 <a:ea typeface="IBM Plex Sans" pitchFamily="34" charset="-122"/>
                 <a:cs typeface="IBM Plex Sans" pitchFamily="34" charset="-120"/>
               </a:rPr>
-              <a:t>Mistake: using &gt; where the rule says 'or more', which rejects a perfectly valid boundary.</a:t>
+              <a:t>Common mistake: using &gt; where the rule says 'or more', which rejects a perfectly valid boundary.</a:t>
             </a:r>
             <a:endParaRPr lang="en-US" sz="1700" dirty="0"/>
           </a:p>
@@ -8859,7 +8859,7 @@
                 <a:ea typeface="IBM Plex Sans" pitchFamily="34" charset="-122"/>
                 <a:cs typeface="IBM Plex Sans" pitchFamily="34" charset="-120"/>
               </a:rPr>
-              <a:t>Mistake: checking the pattern before the length, which can read past the end of the string.</a:t>
+              <a:t>Common mistake: checking the pattern before the length, which can read past the end of the string.</a:t>
             </a:r>
             <a:endParaRPr lang="en-US" sz="1700" dirty="0"/>
           </a:p>
@@ -9435,7 +9435,7 @@
                 <a:ea typeface="IBM Plex Sans" pitchFamily="34" charset="-122"/>
                 <a:cs typeface="IBM Plex Sans" pitchFamily="34" charset="-120"/>
               </a:rPr>
-              <a:t>Mistake: leaving the second input() out, so the loop tests the same bad value forever.</a:t>
+              <a:t>Common mistake: leaving the second input() out, so the loop tests the same bad value forever.</a:t>
             </a:r>
             <a:endParaRPr lang="en-US" sz="1700" dirty="0"/>
           </a:p>
@@ -10011,7 +10011,7 @@
                 <a:ea typeface="IBM Plex Sans" pitchFamily="34" charset="-122"/>
                 <a:cs typeface="IBM Plex Sans" pitchFamily="34" charset="-120"/>
               </a:rPr>
-              <a:t>Mistake: counting the attempts but never stopping, so guessing can carry on forever.</a:t>
+              <a:t>Common mistake: counting the attempts but never stopping, so guessing can carry on forever.</a:t>
             </a:r>
             <a:endParaRPr lang="en-US" sz="1700" dirty="0"/>
           </a:p>
